--- a/靠著耶穌得勝(國語版).pptx
+++ b/靠著耶穌得勝(國語版).pptx
@@ -157,7 +157,7 @@
           <a:lstStyle/>
           <a:p>
             <a:r>
-              <a:rPr lang="en-US" altLang="zh-TW" smtClean="0"/>
+              <a:rPr lang="en-US" altLang="zh-TW"/>
               <a:t>Click to edit Master title style</a:t>
             </a:r>
             <a:endParaRPr lang="zh-TW" altLang="en-US"/>
@@ -276,7 +276,7 @@
           </a:lstStyle>
           <a:p>
             <a:r>
-              <a:rPr lang="en-US" altLang="zh-TW" smtClean="0"/>
+              <a:rPr lang="en-US" altLang="zh-TW"/>
               <a:t>Click to edit Master subtitle style</a:t>
             </a:r>
             <a:endParaRPr lang="zh-TW" altLang="en-US"/>
@@ -300,7 +300,7 @@
           <a:p>
             <a:fld id="{2FC486DF-E8D9-4B51-9564-FAF0EB9E1001}" type="datetimeFigureOut">
               <a:rPr lang="vi-VN" smtClean="0"/>
-              <a:t>07/01/2022</a:t>
+              <a:t>09/05/2025</a:t>
             </a:fld>
             <a:endParaRPr lang="vi-VN"/>
           </a:p>
@@ -394,7 +394,7 @@
           <a:lstStyle/>
           <a:p>
             <a:r>
-              <a:rPr lang="en-US" altLang="zh-TW" smtClean="0"/>
+              <a:rPr lang="en-US" altLang="zh-TW"/>
               <a:t>Click to edit Master title style</a:t>
             </a:r>
             <a:endParaRPr lang="zh-TW" altLang="en-US"/>
@@ -418,35 +418,35 @@
           <a:p>
             <a:pPr lvl="0"/>
             <a:r>
-              <a:rPr lang="en-US" altLang="zh-TW" smtClean="0"/>
+              <a:rPr lang="en-US" altLang="zh-TW"/>
               <a:t>Edit Master text styles</a:t>
             </a:r>
           </a:p>
           <a:p>
             <a:pPr lvl="1"/>
             <a:r>
-              <a:rPr lang="en-US" altLang="zh-TW" smtClean="0"/>
+              <a:rPr lang="en-US" altLang="zh-TW"/>
               <a:t>Second level</a:t>
             </a:r>
           </a:p>
           <a:p>
             <a:pPr lvl="2"/>
             <a:r>
-              <a:rPr lang="en-US" altLang="zh-TW" smtClean="0"/>
+              <a:rPr lang="en-US" altLang="zh-TW"/>
               <a:t>Third level</a:t>
             </a:r>
           </a:p>
           <a:p>
             <a:pPr lvl="3"/>
             <a:r>
-              <a:rPr lang="en-US" altLang="zh-TW" smtClean="0"/>
+              <a:rPr lang="en-US" altLang="zh-TW"/>
               <a:t>Fourth level</a:t>
             </a:r>
           </a:p>
           <a:p>
             <a:pPr lvl="4"/>
             <a:r>
-              <a:rPr lang="en-US" altLang="zh-TW" smtClean="0"/>
+              <a:rPr lang="en-US" altLang="zh-TW"/>
               <a:t>Fifth level</a:t>
             </a:r>
             <a:endParaRPr lang="zh-TW" altLang="en-US"/>
@@ -470,7 +470,7 @@
           <a:p>
             <a:fld id="{2FC486DF-E8D9-4B51-9564-FAF0EB9E1001}" type="datetimeFigureOut">
               <a:rPr lang="vi-VN" smtClean="0"/>
-              <a:t>07/01/2022</a:t>
+              <a:t>09/05/2025</a:t>
             </a:fld>
             <a:endParaRPr lang="vi-VN"/>
           </a:p>
@@ -569,7 +569,7 @@
           <a:lstStyle/>
           <a:p>
             <a:r>
-              <a:rPr lang="en-US" altLang="zh-TW" smtClean="0"/>
+              <a:rPr lang="en-US" altLang="zh-TW"/>
               <a:t>Click to edit Master title style</a:t>
             </a:r>
             <a:endParaRPr lang="zh-TW" altLang="en-US"/>
@@ -598,35 +598,35 @@
           <a:p>
             <a:pPr lvl="0"/>
             <a:r>
-              <a:rPr lang="en-US" altLang="zh-TW" smtClean="0"/>
+              <a:rPr lang="en-US" altLang="zh-TW"/>
               <a:t>Edit Master text styles</a:t>
             </a:r>
           </a:p>
           <a:p>
             <a:pPr lvl="1"/>
             <a:r>
-              <a:rPr lang="en-US" altLang="zh-TW" smtClean="0"/>
+              <a:rPr lang="en-US" altLang="zh-TW"/>
               <a:t>Second level</a:t>
             </a:r>
           </a:p>
           <a:p>
             <a:pPr lvl="2"/>
             <a:r>
-              <a:rPr lang="en-US" altLang="zh-TW" smtClean="0"/>
+              <a:rPr lang="en-US" altLang="zh-TW"/>
               <a:t>Third level</a:t>
             </a:r>
           </a:p>
           <a:p>
             <a:pPr lvl="3"/>
             <a:r>
-              <a:rPr lang="en-US" altLang="zh-TW" smtClean="0"/>
+              <a:rPr lang="en-US" altLang="zh-TW"/>
               <a:t>Fourth level</a:t>
             </a:r>
           </a:p>
           <a:p>
             <a:pPr lvl="4"/>
             <a:r>
-              <a:rPr lang="en-US" altLang="zh-TW" smtClean="0"/>
+              <a:rPr lang="en-US" altLang="zh-TW"/>
               <a:t>Fifth level</a:t>
             </a:r>
             <a:endParaRPr lang="zh-TW" altLang="en-US"/>
@@ -650,7 +650,7 @@
           <a:p>
             <a:fld id="{2FC486DF-E8D9-4B51-9564-FAF0EB9E1001}" type="datetimeFigureOut">
               <a:rPr lang="vi-VN" smtClean="0"/>
-              <a:t>07/01/2022</a:t>
+              <a:t>09/05/2025</a:t>
             </a:fld>
             <a:endParaRPr lang="vi-VN"/>
           </a:p>
@@ -744,7 +744,7 @@
           <a:lstStyle/>
           <a:p>
             <a:r>
-              <a:rPr lang="en-US" altLang="zh-TW" smtClean="0"/>
+              <a:rPr lang="en-US" altLang="zh-TW"/>
               <a:t>Click to edit Master title style</a:t>
             </a:r>
             <a:endParaRPr lang="zh-TW" altLang="en-US"/>
@@ -768,35 +768,35 @@
           <a:p>
             <a:pPr lvl="0"/>
             <a:r>
-              <a:rPr lang="en-US" altLang="zh-TW" smtClean="0"/>
+              <a:rPr lang="en-US" altLang="zh-TW"/>
               <a:t>Edit Master text styles</a:t>
             </a:r>
           </a:p>
           <a:p>
             <a:pPr lvl="1"/>
             <a:r>
-              <a:rPr lang="en-US" altLang="zh-TW" smtClean="0"/>
+              <a:rPr lang="en-US" altLang="zh-TW"/>
               <a:t>Second level</a:t>
             </a:r>
           </a:p>
           <a:p>
             <a:pPr lvl="2"/>
             <a:r>
-              <a:rPr lang="en-US" altLang="zh-TW" smtClean="0"/>
+              <a:rPr lang="en-US" altLang="zh-TW"/>
               <a:t>Third level</a:t>
             </a:r>
           </a:p>
           <a:p>
             <a:pPr lvl="3"/>
             <a:r>
-              <a:rPr lang="en-US" altLang="zh-TW" smtClean="0"/>
+              <a:rPr lang="en-US" altLang="zh-TW"/>
               <a:t>Fourth level</a:t>
             </a:r>
           </a:p>
           <a:p>
             <a:pPr lvl="4"/>
             <a:r>
-              <a:rPr lang="en-US" altLang="zh-TW" smtClean="0"/>
+              <a:rPr lang="en-US" altLang="zh-TW"/>
               <a:t>Fifth level</a:t>
             </a:r>
             <a:endParaRPr lang="zh-TW" altLang="en-US"/>
@@ -820,7 +820,7 @@
           <a:p>
             <a:fld id="{2FC486DF-E8D9-4B51-9564-FAF0EB9E1001}" type="datetimeFigureOut">
               <a:rPr lang="vi-VN" smtClean="0"/>
-              <a:t>07/01/2022</a:t>
+              <a:t>09/05/2025</a:t>
             </a:fld>
             <a:endParaRPr lang="vi-VN"/>
           </a:p>
@@ -923,7 +923,7 @@
           </a:lstStyle>
           <a:p>
             <a:r>
-              <a:rPr lang="en-US" altLang="zh-TW" smtClean="0"/>
+              <a:rPr lang="en-US" altLang="zh-TW"/>
               <a:t>Click to edit Master title style</a:t>
             </a:r>
             <a:endParaRPr lang="zh-TW" altLang="en-US"/>
@@ -1043,7 +1043,7 @@
           <a:p>
             <a:pPr lvl="0"/>
             <a:r>
-              <a:rPr lang="en-US" altLang="zh-TW" smtClean="0"/>
+              <a:rPr lang="en-US" altLang="zh-TW"/>
               <a:t>Edit Master text styles</a:t>
             </a:r>
           </a:p>
@@ -1066,7 +1066,7 @@
           <a:p>
             <a:fld id="{2FC486DF-E8D9-4B51-9564-FAF0EB9E1001}" type="datetimeFigureOut">
               <a:rPr lang="vi-VN" smtClean="0"/>
-              <a:t>07/01/2022</a:t>
+              <a:t>09/05/2025</a:t>
             </a:fld>
             <a:endParaRPr lang="vi-VN"/>
           </a:p>
@@ -1160,7 +1160,7 @@
           <a:lstStyle/>
           <a:p>
             <a:r>
-              <a:rPr lang="en-US" altLang="zh-TW" smtClean="0"/>
+              <a:rPr lang="en-US" altLang="zh-TW"/>
               <a:t>Click to edit Master title style</a:t>
             </a:r>
             <a:endParaRPr lang="zh-TW" altLang="en-US"/>
@@ -1217,35 +1217,35 @@
           <a:p>
             <a:pPr lvl="0"/>
             <a:r>
-              <a:rPr lang="en-US" altLang="zh-TW" smtClean="0"/>
+              <a:rPr lang="en-US" altLang="zh-TW"/>
               <a:t>Edit Master text styles</a:t>
             </a:r>
           </a:p>
           <a:p>
             <a:pPr lvl="1"/>
             <a:r>
-              <a:rPr lang="en-US" altLang="zh-TW" smtClean="0"/>
+              <a:rPr lang="en-US" altLang="zh-TW"/>
               <a:t>Second level</a:t>
             </a:r>
           </a:p>
           <a:p>
             <a:pPr lvl="2"/>
             <a:r>
-              <a:rPr lang="en-US" altLang="zh-TW" smtClean="0"/>
+              <a:rPr lang="en-US" altLang="zh-TW"/>
               <a:t>Third level</a:t>
             </a:r>
           </a:p>
           <a:p>
             <a:pPr lvl="3"/>
             <a:r>
-              <a:rPr lang="en-US" altLang="zh-TW" smtClean="0"/>
+              <a:rPr lang="en-US" altLang="zh-TW"/>
               <a:t>Fourth level</a:t>
             </a:r>
           </a:p>
           <a:p>
             <a:pPr lvl="4"/>
             <a:r>
-              <a:rPr lang="en-US" altLang="zh-TW" smtClean="0"/>
+              <a:rPr lang="en-US" altLang="zh-TW"/>
               <a:t>Fifth level</a:t>
             </a:r>
             <a:endParaRPr lang="zh-TW" altLang="en-US"/>
@@ -1302,35 +1302,35 @@
           <a:p>
             <a:pPr lvl="0"/>
             <a:r>
-              <a:rPr lang="en-US" altLang="zh-TW" smtClean="0"/>
+              <a:rPr lang="en-US" altLang="zh-TW"/>
               <a:t>Edit Master text styles</a:t>
             </a:r>
           </a:p>
           <a:p>
             <a:pPr lvl="1"/>
             <a:r>
-              <a:rPr lang="en-US" altLang="zh-TW" smtClean="0"/>
+              <a:rPr lang="en-US" altLang="zh-TW"/>
               <a:t>Second level</a:t>
             </a:r>
           </a:p>
           <a:p>
             <a:pPr lvl="2"/>
             <a:r>
-              <a:rPr lang="en-US" altLang="zh-TW" smtClean="0"/>
+              <a:rPr lang="en-US" altLang="zh-TW"/>
               <a:t>Third level</a:t>
             </a:r>
           </a:p>
           <a:p>
             <a:pPr lvl="3"/>
             <a:r>
-              <a:rPr lang="en-US" altLang="zh-TW" smtClean="0"/>
+              <a:rPr lang="en-US" altLang="zh-TW"/>
               <a:t>Fourth level</a:t>
             </a:r>
           </a:p>
           <a:p>
             <a:pPr lvl="4"/>
             <a:r>
-              <a:rPr lang="en-US" altLang="zh-TW" smtClean="0"/>
+              <a:rPr lang="en-US" altLang="zh-TW"/>
               <a:t>Fifth level</a:t>
             </a:r>
             <a:endParaRPr lang="zh-TW" altLang="en-US"/>
@@ -1354,7 +1354,7 @@
           <a:p>
             <a:fld id="{2FC486DF-E8D9-4B51-9564-FAF0EB9E1001}" type="datetimeFigureOut">
               <a:rPr lang="vi-VN" smtClean="0"/>
-              <a:t>07/01/2022</a:t>
+              <a:t>09/05/2025</a:t>
             </a:fld>
             <a:endParaRPr lang="vi-VN"/>
           </a:p>
@@ -1452,7 +1452,7 @@
           </a:lstStyle>
           <a:p>
             <a:r>
-              <a:rPr lang="en-US" altLang="zh-TW" smtClean="0"/>
+              <a:rPr lang="en-US" altLang="zh-TW"/>
               <a:t>Click to edit Master title style</a:t>
             </a:r>
             <a:endParaRPr lang="zh-TW" altLang="en-US"/>
@@ -1518,7 +1518,7 @@
           <a:p>
             <a:pPr lvl="0"/>
             <a:r>
-              <a:rPr lang="en-US" altLang="zh-TW" smtClean="0"/>
+              <a:rPr lang="en-US" altLang="zh-TW"/>
               <a:t>Edit Master text styles</a:t>
             </a:r>
           </a:p>
@@ -1574,35 +1574,35 @@
           <a:p>
             <a:pPr lvl="0"/>
             <a:r>
-              <a:rPr lang="en-US" altLang="zh-TW" smtClean="0"/>
+              <a:rPr lang="en-US" altLang="zh-TW"/>
               <a:t>Edit Master text styles</a:t>
             </a:r>
           </a:p>
           <a:p>
             <a:pPr lvl="1"/>
             <a:r>
-              <a:rPr lang="en-US" altLang="zh-TW" smtClean="0"/>
+              <a:rPr lang="en-US" altLang="zh-TW"/>
               <a:t>Second level</a:t>
             </a:r>
           </a:p>
           <a:p>
             <a:pPr lvl="2"/>
             <a:r>
-              <a:rPr lang="en-US" altLang="zh-TW" smtClean="0"/>
+              <a:rPr lang="en-US" altLang="zh-TW"/>
               <a:t>Third level</a:t>
             </a:r>
           </a:p>
           <a:p>
             <a:pPr lvl="3"/>
             <a:r>
-              <a:rPr lang="en-US" altLang="zh-TW" smtClean="0"/>
+              <a:rPr lang="en-US" altLang="zh-TW"/>
               <a:t>Fourth level</a:t>
             </a:r>
           </a:p>
           <a:p>
             <a:pPr lvl="4"/>
             <a:r>
-              <a:rPr lang="en-US" altLang="zh-TW" smtClean="0"/>
+              <a:rPr lang="en-US" altLang="zh-TW"/>
               <a:t>Fifth level</a:t>
             </a:r>
             <a:endParaRPr lang="zh-TW" altLang="en-US"/>
@@ -1668,7 +1668,7 @@
           <a:p>
             <a:pPr lvl="0"/>
             <a:r>
-              <a:rPr lang="en-US" altLang="zh-TW" smtClean="0"/>
+              <a:rPr lang="en-US" altLang="zh-TW"/>
               <a:t>Edit Master text styles</a:t>
             </a:r>
           </a:p>
@@ -1724,35 +1724,35 @@
           <a:p>
             <a:pPr lvl="0"/>
             <a:r>
-              <a:rPr lang="en-US" altLang="zh-TW" smtClean="0"/>
+              <a:rPr lang="en-US" altLang="zh-TW"/>
               <a:t>Edit Master text styles</a:t>
             </a:r>
           </a:p>
           <a:p>
             <a:pPr lvl="1"/>
             <a:r>
-              <a:rPr lang="en-US" altLang="zh-TW" smtClean="0"/>
+              <a:rPr lang="en-US" altLang="zh-TW"/>
               <a:t>Second level</a:t>
             </a:r>
           </a:p>
           <a:p>
             <a:pPr lvl="2"/>
             <a:r>
-              <a:rPr lang="en-US" altLang="zh-TW" smtClean="0"/>
+              <a:rPr lang="en-US" altLang="zh-TW"/>
               <a:t>Third level</a:t>
             </a:r>
           </a:p>
           <a:p>
             <a:pPr lvl="3"/>
             <a:r>
-              <a:rPr lang="en-US" altLang="zh-TW" smtClean="0"/>
+              <a:rPr lang="en-US" altLang="zh-TW"/>
               <a:t>Fourth level</a:t>
             </a:r>
           </a:p>
           <a:p>
             <a:pPr lvl="4"/>
             <a:r>
-              <a:rPr lang="en-US" altLang="zh-TW" smtClean="0"/>
+              <a:rPr lang="en-US" altLang="zh-TW"/>
               <a:t>Fifth level</a:t>
             </a:r>
             <a:endParaRPr lang="zh-TW" altLang="en-US"/>
@@ -1776,7 +1776,7 @@
           <a:p>
             <a:fld id="{2FC486DF-E8D9-4B51-9564-FAF0EB9E1001}" type="datetimeFigureOut">
               <a:rPr lang="vi-VN" smtClean="0"/>
-              <a:t>07/01/2022</a:t>
+              <a:t>09/05/2025</a:t>
             </a:fld>
             <a:endParaRPr lang="vi-VN"/>
           </a:p>
@@ -1870,7 +1870,7 @@
           <a:lstStyle/>
           <a:p>
             <a:r>
-              <a:rPr lang="en-US" altLang="zh-TW" smtClean="0"/>
+              <a:rPr lang="en-US" altLang="zh-TW"/>
               <a:t>Click to edit Master title style</a:t>
             </a:r>
             <a:endParaRPr lang="zh-TW" altLang="en-US"/>
@@ -1894,7 +1894,7 @@
           <a:p>
             <a:fld id="{2FC486DF-E8D9-4B51-9564-FAF0EB9E1001}" type="datetimeFigureOut">
               <a:rPr lang="vi-VN" smtClean="0"/>
-              <a:t>07/01/2022</a:t>
+              <a:t>09/05/2025</a:t>
             </a:fld>
             <a:endParaRPr lang="vi-VN"/>
           </a:p>
@@ -1989,7 +1989,7 @@
           <a:p>
             <a:fld id="{2FC486DF-E8D9-4B51-9564-FAF0EB9E1001}" type="datetimeFigureOut">
               <a:rPr lang="vi-VN" smtClean="0"/>
-              <a:t>07/01/2022</a:t>
+              <a:t>09/05/2025</a:t>
             </a:fld>
             <a:endParaRPr lang="vi-VN"/>
           </a:p>
@@ -2092,7 +2092,7 @@
           </a:lstStyle>
           <a:p>
             <a:r>
-              <a:rPr lang="en-US" altLang="zh-TW" smtClean="0"/>
+              <a:rPr lang="en-US" altLang="zh-TW"/>
               <a:t>Click to edit Master title style</a:t>
             </a:r>
             <a:endParaRPr lang="zh-TW" altLang="en-US"/>
@@ -2149,35 +2149,35 @@
           <a:p>
             <a:pPr lvl="0"/>
             <a:r>
-              <a:rPr lang="en-US" altLang="zh-TW" smtClean="0"/>
+              <a:rPr lang="en-US" altLang="zh-TW"/>
               <a:t>Edit Master text styles</a:t>
             </a:r>
           </a:p>
           <a:p>
             <a:pPr lvl="1"/>
             <a:r>
-              <a:rPr lang="en-US" altLang="zh-TW" smtClean="0"/>
+              <a:rPr lang="en-US" altLang="zh-TW"/>
               <a:t>Second level</a:t>
             </a:r>
           </a:p>
           <a:p>
             <a:pPr lvl="2"/>
             <a:r>
-              <a:rPr lang="en-US" altLang="zh-TW" smtClean="0"/>
+              <a:rPr lang="en-US" altLang="zh-TW"/>
               <a:t>Third level</a:t>
             </a:r>
           </a:p>
           <a:p>
             <a:pPr lvl="3"/>
             <a:r>
-              <a:rPr lang="en-US" altLang="zh-TW" smtClean="0"/>
+              <a:rPr lang="en-US" altLang="zh-TW"/>
               <a:t>Fourth level</a:t>
             </a:r>
           </a:p>
           <a:p>
             <a:pPr lvl="4"/>
             <a:r>
-              <a:rPr lang="en-US" altLang="zh-TW" smtClean="0"/>
+              <a:rPr lang="en-US" altLang="zh-TW"/>
               <a:t>Fifth level</a:t>
             </a:r>
             <a:endParaRPr lang="zh-TW" altLang="en-US"/>
@@ -2243,7 +2243,7 @@
           <a:p>
             <a:pPr lvl="0"/>
             <a:r>
-              <a:rPr lang="en-US" altLang="zh-TW" smtClean="0"/>
+              <a:rPr lang="en-US" altLang="zh-TW"/>
               <a:t>Edit Master text styles</a:t>
             </a:r>
           </a:p>
@@ -2266,7 +2266,7 @@
           <a:p>
             <a:fld id="{2FC486DF-E8D9-4B51-9564-FAF0EB9E1001}" type="datetimeFigureOut">
               <a:rPr lang="vi-VN" smtClean="0"/>
-              <a:t>07/01/2022</a:t>
+              <a:t>09/05/2025</a:t>
             </a:fld>
             <a:endParaRPr lang="vi-VN"/>
           </a:p>
@@ -2369,7 +2369,7 @@
           </a:lstStyle>
           <a:p>
             <a:r>
-              <a:rPr lang="en-US" altLang="zh-TW" smtClean="0"/>
+              <a:rPr lang="en-US" altLang="zh-TW"/>
               <a:t>Click to edit Master title style</a:t>
             </a:r>
             <a:endParaRPr lang="zh-TW" altLang="en-US"/>
@@ -2434,7 +2434,7 @@
           </a:lstStyle>
           <a:p>
             <a:r>
-              <a:rPr lang="en-US" altLang="zh-TW" smtClean="0"/>
+              <a:rPr lang="en-US" altLang="zh-TW"/>
               <a:t>Click icon to add picture</a:t>
             </a:r>
             <a:endParaRPr lang="zh-TW" altLang="en-US"/>
@@ -2500,7 +2500,7 @@
           <a:p>
             <a:pPr lvl="0"/>
             <a:r>
-              <a:rPr lang="en-US" altLang="zh-TW" smtClean="0"/>
+              <a:rPr lang="en-US" altLang="zh-TW"/>
               <a:t>Edit Master text styles</a:t>
             </a:r>
           </a:p>
@@ -2523,7 +2523,7 @@
           <a:p>
             <a:fld id="{2FC486DF-E8D9-4B51-9564-FAF0EB9E1001}" type="datetimeFigureOut">
               <a:rPr lang="vi-VN" smtClean="0"/>
-              <a:t>07/01/2022</a:t>
+              <a:t>09/05/2025</a:t>
             </a:fld>
             <a:endParaRPr lang="vi-VN"/>
           </a:p>
@@ -2637,10 +2637,9 @@
           <a:lstStyle/>
           <a:p>
             <a:r>
-              <a:rPr lang="zh-TW" altLang="en-US" smtClean="0"/>
+              <a:rPr lang="zh-TW" altLang="en-US"/>
               <a:t>按一下以編輯母片標題樣式</a:t>
             </a:r>
-            <a:endParaRPr lang="zh-TW" altLang="en-US"/>
           </a:p>
         </p:txBody>
       </p:sp>
@@ -2671,38 +2670,37 @@
           <a:p>
             <a:pPr lvl="0"/>
             <a:r>
-              <a:rPr lang="zh-TW" altLang="en-US" smtClean="0"/>
+              <a:rPr lang="zh-TW" altLang="en-US"/>
               <a:t>按一下以編輯母片文字樣式</a:t>
             </a:r>
           </a:p>
           <a:p>
             <a:pPr lvl="1"/>
             <a:r>
-              <a:rPr lang="zh-TW" altLang="en-US" smtClean="0"/>
+              <a:rPr lang="zh-TW" altLang="en-US"/>
               <a:t>第二層</a:t>
             </a:r>
           </a:p>
           <a:p>
             <a:pPr lvl="2"/>
             <a:r>
-              <a:rPr lang="zh-TW" altLang="en-US" smtClean="0"/>
+              <a:rPr lang="zh-TW" altLang="en-US"/>
               <a:t>第三層</a:t>
             </a:r>
           </a:p>
           <a:p>
             <a:pPr lvl="3"/>
             <a:r>
-              <a:rPr lang="zh-TW" altLang="en-US" smtClean="0"/>
+              <a:rPr lang="zh-TW" altLang="en-US"/>
               <a:t>第四層</a:t>
             </a:r>
           </a:p>
           <a:p>
             <a:pPr lvl="4"/>
             <a:r>
-              <a:rPr lang="zh-TW" altLang="en-US" smtClean="0"/>
+              <a:rPr lang="zh-TW" altLang="en-US"/>
               <a:t>第五層</a:t>
             </a:r>
-            <a:endParaRPr lang="zh-TW" altLang="en-US"/>
           </a:p>
         </p:txBody>
       </p:sp>
@@ -2741,7 +2739,7 @@
           <a:p>
             <a:fld id="{2FC486DF-E8D9-4B51-9564-FAF0EB9E1001}" type="datetimeFigureOut">
               <a:rPr lang="vi-VN" smtClean="0"/>
-              <a:t>07/01/2022</a:t>
+              <a:t>09/05/2025</a:t>
             </a:fld>
             <a:endParaRPr lang="vi-VN"/>
           </a:p>
@@ -3231,7 +3229,7 @@
                 <a:latin typeface="微軟正黑體" pitchFamily="34" charset="-120"/>
                 <a:ea typeface="微軟正黑體" pitchFamily="34" charset="-120"/>
               </a:rPr>
-              <a:t>袮</a:t>
+              <a:t>祢</a:t>
             </a:r>
             <a:r>
               <a:rPr lang="zh-TW" altLang="en-US" sz="6400" b="1" dirty="0">
@@ -3284,7 +3282,7 @@
         <p:spPr>
           <a:xfrm>
             <a:off x="0" y="5170185"/>
-            <a:ext cx="12192000" cy="830997"/>
+            <a:ext cx="12192000" cy="646331"/>
           </a:xfrm>
           <a:prstGeom prst="rect">
             <a:avLst/>
@@ -3299,7 +3297,7 @@
           <a:p>
             <a:pPr algn="ctr"/>
             <a:r>
-              <a:rPr lang="en-US" altLang="zh-TW" sz="4800" b="1" dirty="0">
+              <a:rPr lang="en-US" altLang="zh-TW" sz="3600" b="1" dirty="0">
                 <a:solidFill>
                   <a:srgbClr val="660033"/>
                 </a:solidFill>
@@ -3310,7 +3308,7 @@
               <a:t>( </a:t>
             </a:r>
             <a:r>
-              <a:rPr lang="zh-CN" altLang="en-US" sz="4800" b="1" dirty="0">
+              <a:rPr lang="zh-CN" altLang="en-US" sz="3600" b="1" dirty="0">
                 <a:solidFill>
                   <a:srgbClr val="660033"/>
                 </a:solidFill>
@@ -3318,10 +3316,10 @@
                 <a:latin typeface="Microsoft JhengHei" panose="020B0604030504040204" pitchFamily="34" charset="-120"/>
                 <a:ea typeface="Microsoft JhengHei" panose="020B0604030504040204" pitchFamily="34" charset="-120"/>
               </a:rPr>
-              <a:t>正 </a:t>
-            </a:r>
-            <a:r>
-              <a:rPr lang="en-US" altLang="zh-TW" sz="4800" b="1" dirty="0">
+              <a:t>正歌 </a:t>
+            </a:r>
+            <a:r>
+              <a:rPr lang="en-US" altLang="zh-TW" sz="3600" b="1" dirty="0">
                 <a:solidFill>
                   <a:srgbClr val="660033"/>
                 </a:solidFill>
@@ -3331,7 +3329,7 @@
               </a:rPr>
               <a:t>)</a:t>
             </a:r>
-            <a:endParaRPr lang="vi-VN" sz="4800" b="1" dirty="0">
+            <a:endParaRPr lang="vi-VN" sz="3600" b="1" dirty="0">
               <a:solidFill>
                 <a:srgbClr val="660033"/>
               </a:solidFill>
@@ -3415,7 +3413,7 @@
                 <a:latin typeface="微軟正黑體" pitchFamily="34" charset="-120"/>
                 <a:ea typeface="微軟正黑體" pitchFamily="34" charset="-120"/>
               </a:rPr>
-              <a:t>袮</a:t>
+              <a:t>祢</a:t>
             </a:r>
             <a:r>
               <a:rPr lang="zh-TW" altLang="en-US" sz="6400" b="1" dirty="0">
@@ -3447,7 +3445,7 @@
                 <a:latin typeface="微軟正黑體" pitchFamily="34" charset="-120"/>
                 <a:ea typeface="微軟正黑體" pitchFamily="34" charset="-120"/>
               </a:rPr>
-              <a:t>袮</a:t>
+              <a:t>祢</a:t>
             </a:r>
             <a:r>
               <a:rPr lang="zh-TW" altLang="en-US" sz="6400" b="1" dirty="0">
@@ -3478,7 +3476,7 @@
         <p:spPr>
           <a:xfrm>
             <a:off x="0" y="5170185"/>
-            <a:ext cx="12192000" cy="830997"/>
+            <a:ext cx="12192000" cy="646331"/>
           </a:xfrm>
           <a:prstGeom prst="rect">
             <a:avLst/>
@@ -3493,44 +3491,39 @@
           <a:p>
             <a:pPr algn="ctr"/>
             <a:r>
-              <a:rPr lang="en-US" altLang="zh-TW" sz="4800" b="1" dirty="0">
+              <a:rPr lang="en-US" altLang="zh-TW" sz="3600" b="1" dirty="0">
                 <a:solidFill>
                   <a:srgbClr val="660033"/>
                 </a:solidFill>
-                <a:effectLst/>
                 <a:latin typeface="Microsoft JhengHei" panose="020B0604030504040204" pitchFamily="34" charset="-120"/>
                 <a:ea typeface="Microsoft JhengHei" panose="020B0604030504040204" pitchFamily="34" charset="-120"/>
               </a:rPr>
               <a:t>( </a:t>
             </a:r>
             <a:r>
-              <a:rPr lang="zh-CN" altLang="en-US" sz="4800" b="1" dirty="0">
+              <a:rPr lang="zh-CN" altLang="en-US" sz="3600" b="1" dirty="0">
                 <a:solidFill>
                   <a:srgbClr val="660033"/>
                 </a:solidFill>
-                <a:effectLst/>
                 <a:latin typeface="Microsoft JhengHei" panose="020B0604030504040204" pitchFamily="34" charset="-120"/>
                 <a:ea typeface="Microsoft JhengHei" panose="020B0604030504040204" pitchFamily="34" charset="-120"/>
               </a:rPr>
-              <a:t>正 </a:t>
-            </a:r>
-            <a:r>
-              <a:rPr lang="en-US" altLang="zh-TW" sz="4800" b="1" dirty="0">
+              <a:t>正歌 </a:t>
+            </a:r>
+            <a:r>
+              <a:rPr lang="en-US" altLang="zh-TW" sz="3600" b="1" dirty="0">
                 <a:solidFill>
                   <a:srgbClr val="660033"/>
                 </a:solidFill>
-                <a:effectLst/>
                 <a:latin typeface="Microsoft JhengHei" panose="020B0604030504040204" pitchFamily="34" charset="-120"/>
                 <a:ea typeface="Microsoft JhengHei" panose="020B0604030504040204" pitchFamily="34" charset="-120"/>
               </a:rPr>
               <a:t>)</a:t>
             </a:r>
-            <a:endParaRPr lang="vi-VN" sz="4800" b="1" dirty="0">
+            <a:endParaRPr lang="vi-VN" sz="3600" b="1" dirty="0">
               <a:solidFill>
                 <a:srgbClr val="660033"/>
               </a:solidFill>
-              <a:effectLst/>
-              <a:latin typeface="Microsoft JhengHei" panose="020B0604030504040204" pitchFamily="34" charset="-120"/>
               <a:ea typeface="Microsoft JhengHei" panose="020B0604030504040204" pitchFamily="34" charset="-120"/>
             </a:endParaRPr>
           </a:p>
@@ -3609,7 +3602,7 @@
                 <a:latin typeface="微軟正黑體" pitchFamily="34" charset="-120"/>
                 <a:ea typeface="微軟正黑體" pitchFamily="34" charset="-120"/>
               </a:rPr>
-              <a:t>袮</a:t>
+              <a:t>祢</a:t>
             </a:r>
             <a:r>
               <a:rPr lang="zh-TW" altLang="en-US" sz="6400" b="1" dirty="0">
@@ -3662,7 +3655,7 @@
         <p:spPr>
           <a:xfrm>
             <a:off x="0" y="5170185"/>
-            <a:ext cx="12192000" cy="830997"/>
+            <a:ext cx="12192000" cy="646331"/>
           </a:xfrm>
           <a:prstGeom prst="rect">
             <a:avLst/>
@@ -3677,44 +3670,39 @@
           <a:p>
             <a:pPr algn="ctr"/>
             <a:r>
-              <a:rPr lang="en-US" altLang="zh-TW" sz="4800" b="1" dirty="0">
+              <a:rPr lang="en-US" altLang="zh-TW" sz="3600" b="1" dirty="0">
                 <a:solidFill>
                   <a:srgbClr val="660033"/>
                 </a:solidFill>
-                <a:effectLst/>
                 <a:latin typeface="Microsoft JhengHei" panose="020B0604030504040204" pitchFamily="34" charset="-120"/>
                 <a:ea typeface="Microsoft JhengHei" panose="020B0604030504040204" pitchFamily="34" charset="-120"/>
               </a:rPr>
               <a:t>( </a:t>
             </a:r>
             <a:r>
-              <a:rPr lang="zh-CN" altLang="en-US" sz="4800" b="1" dirty="0">
+              <a:rPr lang="zh-CN" altLang="en-US" sz="3600" b="1" dirty="0">
                 <a:solidFill>
                   <a:srgbClr val="660033"/>
                 </a:solidFill>
-                <a:effectLst/>
                 <a:latin typeface="Microsoft JhengHei" panose="020B0604030504040204" pitchFamily="34" charset="-120"/>
                 <a:ea typeface="Microsoft JhengHei" panose="020B0604030504040204" pitchFamily="34" charset="-120"/>
               </a:rPr>
-              <a:t>正 </a:t>
-            </a:r>
-            <a:r>
-              <a:rPr lang="en-US" altLang="zh-TW" sz="4800" b="1" dirty="0">
+              <a:t>正歌 </a:t>
+            </a:r>
+            <a:r>
+              <a:rPr lang="en-US" altLang="zh-TW" sz="3600" b="1" dirty="0">
                 <a:solidFill>
                   <a:srgbClr val="660033"/>
                 </a:solidFill>
-                <a:effectLst/>
                 <a:latin typeface="Microsoft JhengHei" panose="020B0604030504040204" pitchFamily="34" charset="-120"/>
                 <a:ea typeface="Microsoft JhengHei" panose="020B0604030504040204" pitchFamily="34" charset="-120"/>
               </a:rPr>
               <a:t>)</a:t>
             </a:r>
-            <a:endParaRPr lang="vi-VN" sz="4800" b="1" dirty="0">
+            <a:endParaRPr lang="vi-VN" sz="3600" b="1" dirty="0">
               <a:solidFill>
                 <a:srgbClr val="660033"/>
               </a:solidFill>
-              <a:effectLst/>
-              <a:latin typeface="Microsoft JhengHei" panose="020B0604030504040204" pitchFamily="34" charset="-120"/>
               <a:ea typeface="Microsoft JhengHei" panose="020B0604030504040204" pitchFamily="34" charset="-120"/>
             </a:endParaRPr>
           </a:p>
@@ -3793,7 +3781,7 @@
                 <a:latin typeface="微軟正黑體" pitchFamily="34" charset="-120"/>
                 <a:ea typeface="微軟正黑體" pitchFamily="34" charset="-120"/>
               </a:rPr>
-              <a:t>袮</a:t>
+              <a:t>祢</a:t>
             </a:r>
             <a:r>
               <a:rPr lang="zh-TW" altLang="en-US" sz="6400" b="1" dirty="0">
@@ -3824,7 +3812,7 @@
         <p:spPr>
           <a:xfrm>
             <a:off x="0" y="5170185"/>
-            <a:ext cx="12192000" cy="830997"/>
+            <a:ext cx="12192000" cy="646331"/>
           </a:xfrm>
           <a:prstGeom prst="rect">
             <a:avLst/>
@@ -3839,44 +3827,39 @@
           <a:p>
             <a:pPr algn="ctr"/>
             <a:r>
-              <a:rPr lang="en-US" altLang="zh-TW" sz="4800" b="1" dirty="0">
+              <a:rPr lang="en-US" altLang="zh-TW" sz="3600" b="1" dirty="0">
                 <a:solidFill>
                   <a:srgbClr val="660033"/>
                 </a:solidFill>
-                <a:effectLst/>
                 <a:latin typeface="Microsoft JhengHei" panose="020B0604030504040204" pitchFamily="34" charset="-120"/>
                 <a:ea typeface="Microsoft JhengHei" panose="020B0604030504040204" pitchFamily="34" charset="-120"/>
               </a:rPr>
               <a:t>( </a:t>
             </a:r>
             <a:r>
-              <a:rPr lang="zh-CN" altLang="en-US" sz="4800" b="1" dirty="0">
+              <a:rPr lang="zh-CN" altLang="en-US" sz="3600" b="1" dirty="0">
                 <a:solidFill>
                   <a:srgbClr val="660033"/>
                 </a:solidFill>
-                <a:effectLst/>
                 <a:latin typeface="Microsoft JhengHei" panose="020B0604030504040204" pitchFamily="34" charset="-120"/>
                 <a:ea typeface="Microsoft JhengHei" panose="020B0604030504040204" pitchFamily="34" charset="-120"/>
               </a:rPr>
-              <a:t>正 </a:t>
-            </a:r>
-            <a:r>
-              <a:rPr lang="en-US" altLang="zh-TW" sz="4800" b="1" dirty="0">
+              <a:t>正歌 </a:t>
+            </a:r>
+            <a:r>
+              <a:rPr lang="en-US" altLang="zh-TW" sz="3600" b="1" dirty="0">
                 <a:solidFill>
                   <a:srgbClr val="660033"/>
                 </a:solidFill>
-                <a:effectLst/>
                 <a:latin typeface="Microsoft JhengHei" panose="020B0604030504040204" pitchFamily="34" charset="-120"/>
                 <a:ea typeface="Microsoft JhengHei" panose="020B0604030504040204" pitchFamily="34" charset="-120"/>
               </a:rPr>
               <a:t>)</a:t>
             </a:r>
-            <a:endParaRPr lang="vi-VN" sz="4800" b="1" dirty="0">
+            <a:endParaRPr lang="vi-VN" sz="3600" b="1" dirty="0">
               <a:solidFill>
                 <a:srgbClr val="660033"/>
               </a:solidFill>
-              <a:effectLst/>
-              <a:latin typeface="Microsoft JhengHei" panose="020B0604030504040204" pitchFamily="34" charset="-120"/>
               <a:ea typeface="Microsoft JhengHei" panose="020B0604030504040204" pitchFamily="34" charset="-120"/>
             </a:endParaRPr>
           </a:p>
@@ -3988,7 +3971,7 @@
         <p:spPr>
           <a:xfrm>
             <a:off x="0" y="5170185"/>
-            <a:ext cx="12192000" cy="830997"/>
+            <a:ext cx="12192000" cy="646331"/>
           </a:xfrm>
           <a:prstGeom prst="rect">
             <a:avLst/>
@@ -4003,44 +3986,39 @@
           <a:p>
             <a:pPr algn="ctr"/>
             <a:r>
-              <a:rPr lang="en-US" altLang="zh-TW" sz="4800" b="1" dirty="0">
+              <a:rPr lang="en-US" altLang="zh-TW" sz="3600" b="1" dirty="0">
                 <a:solidFill>
                   <a:srgbClr val="660033"/>
                 </a:solidFill>
-                <a:effectLst/>
                 <a:latin typeface="Microsoft JhengHei" panose="020B0604030504040204" pitchFamily="34" charset="-120"/>
                 <a:ea typeface="Microsoft JhengHei" panose="020B0604030504040204" pitchFamily="34" charset="-120"/>
               </a:rPr>
               <a:t>( </a:t>
             </a:r>
             <a:r>
-              <a:rPr lang="zh-CN" altLang="en-US" sz="4800" b="1" dirty="0" smtClean="0">
+              <a:rPr lang="zh-CN" altLang="en-US" sz="3600" b="1" dirty="0">
                 <a:solidFill>
                   <a:srgbClr val="660033"/>
                 </a:solidFill>
-                <a:effectLst/>
                 <a:latin typeface="Microsoft JhengHei" panose="020B0604030504040204" pitchFamily="34" charset="-120"/>
                 <a:ea typeface="Microsoft JhengHei" panose="020B0604030504040204" pitchFamily="34" charset="-120"/>
               </a:rPr>
-              <a:t>副 </a:t>
-            </a:r>
-            <a:r>
-              <a:rPr lang="en-US" altLang="zh-TW" sz="4800" b="1" dirty="0">
+              <a:t>副歌 </a:t>
+            </a:r>
+            <a:r>
+              <a:rPr lang="en-US" altLang="zh-TW" sz="3600" b="1" dirty="0">
                 <a:solidFill>
                   <a:srgbClr val="660033"/>
                 </a:solidFill>
-                <a:effectLst/>
                 <a:latin typeface="Microsoft JhengHei" panose="020B0604030504040204" pitchFamily="34" charset="-120"/>
                 <a:ea typeface="Microsoft JhengHei" panose="020B0604030504040204" pitchFamily="34" charset="-120"/>
               </a:rPr>
               <a:t>)</a:t>
             </a:r>
-            <a:endParaRPr lang="vi-VN" sz="4800" b="1" dirty="0">
+            <a:endParaRPr lang="vi-VN" sz="3600" b="1" dirty="0">
               <a:solidFill>
                 <a:srgbClr val="660033"/>
               </a:solidFill>
-              <a:effectLst/>
-              <a:latin typeface="Microsoft JhengHei" panose="020B0604030504040204" pitchFamily="34" charset="-120"/>
               <a:ea typeface="Microsoft JhengHei" panose="020B0604030504040204" pitchFamily="34" charset="-120"/>
             </a:endParaRPr>
           </a:p>
@@ -4152,7 +4130,7 @@
         <p:spPr>
           <a:xfrm>
             <a:off x="0" y="5170185"/>
-            <a:ext cx="12192000" cy="830997"/>
+            <a:ext cx="12192000" cy="646331"/>
           </a:xfrm>
           <a:prstGeom prst="rect">
             <a:avLst/>
@@ -4167,44 +4145,39 @@
           <a:p>
             <a:pPr algn="ctr"/>
             <a:r>
-              <a:rPr lang="en-US" altLang="zh-TW" sz="4800" b="1" dirty="0">
+              <a:rPr lang="en-US" altLang="zh-TW" sz="3600" b="1" dirty="0">
                 <a:solidFill>
                   <a:srgbClr val="660033"/>
                 </a:solidFill>
-                <a:effectLst/>
                 <a:latin typeface="Microsoft JhengHei" panose="020B0604030504040204" pitchFamily="34" charset="-120"/>
                 <a:ea typeface="Microsoft JhengHei" panose="020B0604030504040204" pitchFamily="34" charset="-120"/>
               </a:rPr>
               <a:t>( </a:t>
             </a:r>
             <a:r>
-              <a:rPr lang="zh-CN" altLang="en-US" sz="4800" b="1" dirty="0" smtClean="0">
+              <a:rPr lang="zh-CN" altLang="en-US" sz="3600" b="1" dirty="0">
                 <a:solidFill>
                   <a:srgbClr val="660033"/>
                 </a:solidFill>
-                <a:effectLst/>
                 <a:latin typeface="Microsoft JhengHei" panose="020B0604030504040204" pitchFamily="34" charset="-120"/>
                 <a:ea typeface="Microsoft JhengHei" panose="020B0604030504040204" pitchFamily="34" charset="-120"/>
               </a:rPr>
-              <a:t>副 </a:t>
-            </a:r>
-            <a:r>
-              <a:rPr lang="en-US" altLang="zh-TW" sz="4800" b="1" dirty="0">
+              <a:t>副歌 </a:t>
+            </a:r>
+            <a:r>
+              <a:rPr lang="en-US" altLang="zh-TW" sz="3600" b="1" dirty="0">
                 <a:solidFill>
                   <a:srgbClr val="660033"/>
                 </a:solidFill>
-                <a:effectLst/>
                 <a:latin typeface="Microsoft JhengHei" panose="020B0604030504040204" pitchFamily="34" charset="-120"/>
                 <a:ea typeface="Microsoft JhengHei" panose="020B0604030504040204" pitchFamily="34" charset="-120"/>
               </a:rPr>
               <a:t>)</a:t>
             </a:r>
-            <a:endParaRPr lang="vi-VN" sz="4800" b="1" dirty="0">
+            <a:endParaRPr lang="vi-VN" sz="3600" b="1" dirty="0">
               <a:solidFill>
                 <a:srgbClr val="660033"/>
               </a:solidFill>
-              <a:effectLst/>
-              <a:latin typeface="Microsoft JhengHei" panose="020B0604030504040204" pitchFamily="34" charset="-120"/>
               <a:ea typeface="Microsoft JhengHei" panose="020B0604030504040204" pitchFamily="34" charset="-120"/>
             </a:endParaRPr>
           </a:p>
@@ -4283,7 +4256,7 @@
                 <a:latin typeface="微軟正黑體" pitchFamily="34" charset="-120"/>
                 <a:ea typeface="微軟正黑體" pitchFamily="34" charset="-120"/>
               </a:rPr>
-              <a:t>袮</a:t>
+              <a:t>祢</a:t>
             </a:r>
             <a:r>
               <a:rPr lang="zh-TW" altLang="en-US" sz="6400" b="1" dirty="0">
@@ -4314,7 +4287,7 @@
         <p:spPr>
           <a:xfrm>
             <a:off x="0" y="5170185"/>
-            <a:ext cx="12192000" cy="830997"/>
+            <a:ext cx="12192000" cy="646331"/>
           </a:xfrm>
           <a:prstGeom prst="rect">
             <a:avLst/>
@@ -4329,44 +4302,39 @@
           <a:p>
             <a:pPr algn="ctr"/>
             <a:r>
-              <a:rPr lang="en-US" altLang="zh-TW" sz="4800" b="1" dirty="0">
+              <a:rPr lang="en-US" altLang="zh-TW" sz="3600" b="1" dirty="0">
                 <a:solidFill>
                   <a:srgbClr val="660033"/>
                 </a:solidFill>
-                <a:effectLst/>
                 <a:latin typeface="Microsoft JhengHei" panose="020B0604030504040204" pitchFamily="34" charset="-120"/>
                 <a:ea typeface="Microsoft JhengHei" panose="020B0604030504040204" pitchFamily="34" charset="-120"/>
               </a:rPr>
               <a:t>( </a:t>
             </a:r>
             <a:r>
-              <a:rPr lang="zh-CN" altLang="en-US" sz="4800" b="1" dirty="0" smtClean="0">
+              <a:rPr lang="zh-CN" altLang="en-US" sz="3600" b="1" dirty="0">
                 <a:solidFill>
                   <a:srgbClr val="660033"/>
                 </a:solidFill>
-                <a:effectLst/>
                 <a:latin typeface="Microsoft JhengHei" panose="020B0604030504040204" pitchFamily="34" charset="-120"/>
                 <a:ea typeface="Microsoft JhengHei" panose="020B0604030504040204" pitchFamily="34" charset="-120"/>
               </a:rPr>
-              <a:t>副 </a:t>
-            </a:r>
-            <a:r>
-              <a:rPr lang="en-US" altLang="zh-TW" sz="4800" b="1" dirty="0">
+              <a:t>副歌 </a:t>
+            </a:r>
+            <a:r>
+              <a:rPr lang="en-US" altLang="zh-TW" sz="3600" b="1" dirty="0">
                 <a:solidFill>
                   <a:srgbClr val="660033"/>
                 </a:solidFill>
-                <a:effectLst/>
                 <a:latin typeface="Microsoft JhengHei" panose="020B0604030504040204" pitchFamily="34" charset="-120"/>
                 <a:ea typeface="Microsoft JhengHei" panose="020B0604030504040204" pitchFamily="34" charset="-120"/>
               </a:rPr>
               <a:t>)</a:t>
             </a:r>
-            <a:endParaRPr lang="vi-VN" sz="4800" b="1" dirty="0">
+            <a:endParaRPr lang="vi-VN" sz="3600" b="1" dirty="0">
               <a:solidFill>
                 <a:srgbClr val="660033"/>
               </a:solidFill>
-              <a:effectLst/>
-              <a:latin typeface="Microsoft JhengHei" panose="020B0604030504040204" pitchFamily="34" charset="-120"/>
               <a:ea typeface="Microsoft JhengHei" panose="020B0604030504040204" pitchFamily="34" charset="-120"/>
             </a:endParaRPr>
           </a:p>
